--- a/media/resources/files/Onduktar_Akcha_KalkulyatorsuzIshtoo_KondumB_QjY34VY.pptx
+++ b/media/resources/files/Onduktar_Akcha_KalkulyatorsuzIshtoo_KondumB_QjY34VY.pptx
@@ -15714,7 +15714,7 @@
                 <a:ea typeface="+mn-ea"/>
                 <a:cs typeface="+mn-cs"/>
               </a:rPr>
-              <a:t>Турдуу пикирлер учун ыраазычылык билдиребиз.</a:t>
+              <a:t>Түрдүү пикирлер үчүн ыраазычылык билдиребиз.</a:t>
             </a:r>
           </a:p>
           <a:p>

--- a/media/resources/files/Onduktar_Akcha_KalkulyatorsuzIshtoo_KondumB_QjY34VY.pptx
+++ b/media/resources/files/Onduktar_Akcha_KalkulyatorsuzIshtoo_KondumB_QjY34VY.pptx
@@ -3433,7 +3433,7 @@
                     <a:schemeClr val="tx1"/>
                   </a:solidFill>
                 </a:rPr>
-                <a:t>14.10c</a:t>
+                <a:t>14,10c</a:t>
               </a:r>
             </a:p>
           </p:txBody>
@@ -3609,7 +3609,7 @@
                     <a:schemeClr val="tx1"/>
                   </a:solidFill>
                 </a:rPr>
-                <a:t>17.56c</a:t>
+                <a:t>17,56c</a:t>
               </a:r>
             </a:p>
           </p:txBody>
@@ -3733,7 +3733,7 @@
                     <a:schemeClr val="tx1"/>
                   </a:solidFill>
                 </a:rPr>
-                <a:t>55.25c</a:t>
+                <a:t>55,25c</a:t>
               </a:r>
             </a:p>
           </p:txBody>
@@ -3863,7 +3863,7 @@
                     <a:schemeClr val="tx1"/>
                   </a:solidFill>
                 </a:rPr>
-                <a:t>45.08c</a:t>
+                <a:t>45,08c</a:t>
               </a:r>
             </a:p>
           </p:txBody>
@@ -3993,7 +3993,7 @@
                     <a:schemeClr val="tx1"/>
                   </a:solidFill>
                 </a:rPr>
-                <a:t>49.61 c</a:t>
+                <a:t>49,61 c</a:t>
               </a:r>
             </a:p>
           </p:txBody>
@@ -4118,7 +4118,7 @@
                     <a:schemeClr val="tx1"/>
                   </a:solidFill>
                 </a:rPr>
-                <a:t>33.15c</a:t>
+                <a:t>33,15c</a:t>
               </a:r>
             </a:p>
           </p:txBody>
@@ -4248,7 +4248,7 @@
                     <a:schemeClr val="tx1"/>
                   </a:solidFill>
                 </a:rPr>
-                <a:t>18.59c</a:t>
+                <a:t>18,59c</a:t>
               </a:r>
             </a:p>
           </p:txBody>
@@ -4378,7 +4378,7 @@
                     <a:schemeClr val="tx1"/>
                   </a:solidFill>
                 </a:rPr>
-                <a:t>82.69c</a:t>
+                <a:t>82,69c</a:t>
               </a:r>
             </a:p>
           </p:txBody>
@@ -4507,7 +4507,7 @@
                     <a:schemeClr val="tx1"/>
                   </a:solidFill>
                 </a:rPr>
-                <a:t>16.54 c</a:t>
+                <a:t>16,54 c</a:t>
               </a:r>
             </a:p>
           </p:txBody>
@@ -4642,7 +4642,7 @@
             <a:pPr algn="l"/>
             <a:r>
               <a:rPr lang="ky-KG" sz="2000" dirty="0"/>
-              <a:t>90.16с</a:t>
+              <a:t>90,16с</a:t>
             </a:r>
             <a:endParaRPr lang="en-GB" sz="2000" dirty="0"/>
           </a:p>
@@ -4686,7 +4686,7 @@
             <a:pPr algn="l"/>
             <a:r>
               <a:rPr lang="ky-KG" sz="2000" dirty="0"/>
-              <a:t>42.30с</a:t>
+              <a:t>42,30с</a:t>
             </a:r>
             <a:endParaRPr lang="en-GB" sz="2000" dirty="0"/>
           </a:p>
@@ -4730,7 +4730,7 @@
             <a:pPr algn="l"/>
             <a:r>
               <a:rPr lang="ky-KG" sz="2000" dirty="0"/>
-              <a:t>59.18с</a:t>
+              <a:t>59,18с</a:t>
             </a:r>
             <a:endParaRPr lang="en-GB" sz="2000" dirty="0"/>
           </a:p>
@@ -4774,7 +4774,7 @@
             <a:pPr algn="l"/>
             <a:r>
               <a:rPr lang="ky-KG" sz="2000" dirty="0"/>
-              <a:t>66.16с</a:t>
+              <a:t>66,16с</a:t>
             </a:r>
             <a:endParaRPr lang="en-GB" sz="2000" dirty="0"/>
           </a:p>
@@ -4818,7 +4818,7 @@
             <a:pPr algn="l"/>
             <a:r>
               <a:rPr lang="ky-KG" sz="2000" dirty="0"/>
-              <a:t>116.78с</a:t>
+              <a:t>116,78с</a:t>
             </a:r>
             <a:endParaRPr lang="en-GB" sz="2000" dirty="0"/>
           </a:p>
@@ -4862,7 +4862,7 @@
             <a:pPr algn="l"/>
             <a:r>
               <a:rPr lang="ky-KG" sz="2000" dirty="0"/>
-              <a:t>179.48с</a:t>
+              <a:t>179,48с</a:t>
             </a:r>
             <a:endParaRPr lang="en-GB" sz="2000" dirty="0"/>
           </a:p>
@@ -4906,7 +4906,7 @@
             <a:pPr algn="l"/>
             <a:r>
               <a:rPr lang="ky-KG" sz="2000" dirty="0"/>
-              <a:t>201.54с</a:t>
+              <a:t>201,54с</a:t>
             </a:r>
             <a:endParaRPr lang="en-GB" sz="2000" dirty="0"/>
           </a:p>
@@ -4950,7 +4950,7 @@
             <a:pPr algn="l"/>
             <a:r>
               <a:rPr lang="ky-KG" sz="2000" dirty="0"/>
-              <a:t>74.76с</a:t>
+              <a:t>74,76с</a:t>
             </a:r>
             <a:endParaRPr lang="en-GB" sz="2000" dirty="0"/>
           </a:p>
@@ -6987,7 +6987,7 @@
                     <a:schemeClr val="tx1"/>
                   </a:solidFill>
                 </a:rPr>
-                <a:t>14.10c</a:t>
+                <a:t>14,10c</a:t>
               </a:r>
             </a:p>
           </p:txBody>
@@ -7163,7 +7163,7 @@
                     <a:schemeClr val="tx1"/>
                   </a:solidFill>
                 </a:rPr>
-                <a:t>17.56c</a:t>
+                <a:t>17,56c</a:t>
               </a:r>
             </a:p>
           </p:txBody>
@@ -7287,7 +7287,7 @@
                     <a:schemeClr val="tx1"/>
                   </a:solidFill>
                 </a:rPr>
-                <a:t>55.25c</a:t>
+                <a:t>55,25c</a:t>
               </a:r>
             </a:p>
           </p:txBody>
@@ -7417,7 +7417,7 @@
                     <a:schemeClr val="tx1"/>
                   </a:solidFill>
                 </a:rPr>
-                <a:t>45.08c</a:t>
+                <a:t>45,08c</a:t>
               </a:r>
             </a:p>
           </p:txBody>
@@ -7547,7 +7547,7 @@
                     <a:schemeClr val="tx1"/>
                   </a:solidFill>
                 </a:rPr>
-                <a:t>49.61 c</a:t>
+                <a:t>49,61 c</a:t>
               </a:r>
             </a:p>
           </p:txBody>
@@ -7672,7 +7672,7 @@
                     <a:schemeClr val="tx1"/>
                   </a:solidFill>
                 </a:rPr>
-                <a:t>33.15c</a:t>
+                <a:t>33,15c</a:t>
               </a:r>
             </a:p>
           </p:txBody>
@@ -7802,7 +7802,7 @@
                     <a:schemeClr val="tx1"/>
                   </a:solidFill>
                 </a:rPr>
-                <a:t>18.59c</a:t>
+                <a:t>18,59c</a:t>
               </a:r>
             </a:p>
           </p:txBody>
@@ -7932,7 +7932,7 @@
                     <a:schemeClr val="tx1"/>
                   </a:solidFill>
                 </a:rPr>
-                <a:t>82.69c</a:t>
+                <a:t>82,69c</a:t>
               </a:r>
             </a:p>
           </p:txBody>
@@ -8061,7 +8061,7 @@
                     <a:schemeClr val="tx1"/>
                   </a:solidFill>
                 </a:rPr>
-                <a:t>16.54 c</a:t>
+                <a:t>16,54 c</a:t>
               </a:r>
             </a:p>
           </p:txBody>
@@ -8196,7 +8196,7 @@
             <a:pPr algn="l"/>
             <a:r>
               <a:rPr lang="ky-KG" sz="2000" dirty="0"/>
-              <a:t>810.17с</a:t>
+              <a:t>810,17с</a:t>
             </a:r>
             <a:endParaRPr lang="en-GB" sz="2000" dirty="0"/>
           </a:p>
@@ -8240,7 +8240,7 @@
             <a:pPr algn="l"/>
             <a:r>
               <a:rPr lang="ky-KG" sz="2000" dirty="0"/>
-              <a:t>717.17с</a:t>
+              <a:t>717,17с</a:t>
             </a:r>
             <a:endParaRPr lang="en-GB" sz="2000" dirty="0"/>
           </a:p>
@@ -8284,7 +8284,7 @@
             <a:pPr algn="l"/>
             <a:r>
               <a:rPr lang="ky-KG" sz="2000" dirty="0"/>
-              <a:t>307.13с</a:t>
+              <a:t>307,13с</a:t>
             </a:r>
             <a:endParaRPr lang="en-GB" sz="2000" dirty="0"/>
           </a:p>
@@ -8328,7 +8328,7 @@
             <a:pPr algn="l"/>
             <a:r>
               <a:rPr lang="ky-KG" sz="2000" dirty="0"/>
-              <a:t>212.82с</a:t>
+              <a:t>212,82с</a:t>
             </a:r>
             <a:endParaRPr lang="en-GB" sz="2000" dirty="0"/>
           </a:p>
@@ -8372,7 +8372,7 @@
             <a:pPr algn="l"/>
             <a:r>
               <a:rPr lang="ky-KG" sz="2000" dirty="0"/>
-              <a:t>296.04с</a:t>
+              <a:t>296,04с</a:t>
             </a:r>
             <a:endParaRPr lang="en-GB" sz="2000" dirty="0"/>
           </a:p>
@@ -8416,7 +8416,7 @@
             <a:pPr algn="l"/>
             <a:r>
               <a:rPr lang="ky-KG" sz="2000" dirty="0"/>
-              <a:t>300.75с</a:t>
+              <a:t>300,75с</a:t>
             </a:r>
             <a:endParaRPr lang="en-GB" sz="2000" dirty="0"/>
           </a:p>
@@ -8460,7 +8460,7 @@
             <a:pPr algn="l"/>
             <a:r>
               <a:rPr lang="ky-KG" sz="2000" dirty="0"/>
-              <a:t>132.32с</a:t>
+              <a:t>132,32с</a:t>
             </a:r>
             <a:endParaRPr lang="en-GB" sz="2000" dirty="0"/>
           </a:p>
@@ -8504,7 +8504,7 @@
             <a:pPr algn="l"/>
             <a:r>
               <a:rPr lang="ky-KG" sz="2000" dirty="0"/>
-              <a:t>181.92с</a:t>
+              <a:t>181,92с</a:t>
             </a:r>
             <a:endParaRPr lang="en-GB" sz="2000" dirty="0"/>
           </a:p>
@@ -8609,7 +8609,7 @@
             <a:pPr algn="l"/>
             <a:r>
               <a:rPr lang="ky-KG" sz="2000" dirty="0"/>
-              <a:t>90.16с</a:t>
+              <a:t>90,16с</a:t>
             </a:r>
             <a:endParaRPr lang="en-GB" sz="2000" dirty="0"/>
           </a:p>
@@ -8653,7 +8653,7 @@
             <a:pPr algn="l"/>
             <a:r>
               <a:rPr lang="ky-KG" sz="2000" dirty="0"/>
-              <a:t>42.30с</a:t>
+              <a:t>42,30с</a:t>
             </a:r>
             <a:endParaRPr lang="en-GB" sz="2000" dirty="0"/>
           </a:p>
@@ -8697,7 +8697,7 @@
             <a:pPr algn="l"/>
             <a:r>
               <a:rPr lang="ky-KG" sz="2000" dirty="0"/>
-              <a:t>59.18с</a:t>
+              <a:t>59,18с</a:t>
             </a:r>
             <a:endParaRPr lang="en-GB" sz="2000" dirty="0"/>
           </a:p>
@@ -8741,7 +8741,7 @@
             <a:pPr algn="l"/>
             <a:r>
               <a:rPr lang="ky-KG" sz="2000" dirty="0"/>
-              <a:t>66.16с</a:t>
+              <a:t>66,16с</a:t>
             </a:r>
             <a:endParaRPr lang="en-GB" sz="2000" dirty="0"/>
           </a:p>
@@ -8785,7 +8785,7 @@
             <a:pPr algn="l"/>
             <a:r>
               <a:rPr lang="ky-KG" sz="2000" dirty="0"/>
-              <a:t>116.78с</a:t>
+              <a:t>116,78с</a:t>
             </a:r>
             <a:endParaRPr lang="en-GB" sz="2000" dirty="0"/>
           </a:p>
@@ -8829,7 +8829,7 @@
             <a:pPr algn="l"/>
             <a:r>
               <a:rPr lang="ky-KG" sz="2000" dirty="0"/>
-              <a:t>179.48с</a:t>
+              <a:t>179,48с</a:t>
             </a:r>
             <a:endParaRPr lang="en-GB" sz="2000" dirty="0"/>
           </a:p>
@@ -8873,7 +8873,7 @@
             <a:pPr algn="l"/>
             <a:r>
               <a:rPr lang="ky-KG" sz="2000" dirty="0"/>
-              <a:t>201.54с</a:t>
+              <a:t>201,54с</a:t>
             </a:r>
             <a:endParaRPr lang="en-GB" sz="2000" dirty="0"/>
           </a:p>
@@ -8917,7 +8917,7 @@
             <a:pPr algn="l"/>
             <a:r>
               <a:rPr lang="ky-KG" sz="2000" dirty="0"/>
-              <a:t>74.76с</a:t>
+              <a:t>74,76с</a:t>
             </a:r>
             <a:endParaRPr lang="en-GB" sz="2000" dirty="0"/>
           </a:p>
@@ -10954,7 +10954,7 @@
                     <a:schemeClr val="tx1"/>
                   </a:solidFill>
                 </a:rPr>
-                <a:t>14.10c</a:t>
+                <a:t>14,10c</a:t>
               </a:r>
             </a:p>
           </p:txBody>
@@ -11130,7 +11130,7 @@
                     <a:schemeClr val="tx1"/>
                   </a:solidFill>
                 </a:rPr>
-                <a:t>17.56c</a:t>
+                <a:t>17,56c</a:t>
               </a:r>
             </a:p>
           </p:txBody>
@@ -11254,7 +11254,7 @@
                     <a:schemeClr val="tx1"/>
                   </a:solidFill>
                 </a:rPr>
-                <a:t>55.25c</a:t>
+                <a:t>55,25c</a:t>
               </a:r>
             </a:p>
           </p:txBody>
@@ -11384,7 +11384,7 @@
                     <a:schemeClr val="tx1"/>
                   </a:solidFill>
                 </a:rPr>
-                <a:t>45.08c</a:t>
+                <a:t>45,08c</a:t>
               </a:r>
             </a:p>
           </p:txBody>
@@ -11514,7 +11514,7 @@
                     <a:schemeClr val="tx1"/>
                   </a:solidFill>
                 </a:rPr>
-                <a:t>49.61 c</a:t>
+                <a:t>49,61 c</a:t>
               </a:r>
             </a:p>
           </p:txBody>
@@ -11639,7 +11639,7 @@
                     <a:schemeClr val="tx1"/>
                   </a:solidFill>
                 </a:rPr>
-                <a:t>33.15c</a:t>
+                <a:t>33,15c</a:t>
               </a:r>
             </a:p>
           </p:txBody>
@@ -11769,7 +11769,7 @@
                     <a:schemeClr val="tx1"/>
                   </a:solidFill>
                 </a:rPr>
-                <a:t>18.59c</a:t>
+                <a:t>18,59c</a:t>
               </a:r>
             </a:p>
           </p:txBody>
@@ -11899,7 +11899,7 @@
                     <a:schemeClr val="tx1"/>
                   </a:solidFill>
                 </a:rPr>
-                <a:t>82.69c</a:t>
+                <a:t>82,69c</a:t>
               </a:r>
             </a:p>
           </p:txBody>
@@ -12028,7 +12028,7 @@
                     <a:schemeClr val="tx1"/>
                   </a:solidFill>
                 </a:rPr>
-                <a:t>16.54 c</a:t>
+                <a:t>16,54 c</a:t>
               </a:r>
             </a:p>
           </p:txBody>
@@ -14095,7 +14095,7 @@
                     <a:schemeClr val="tx1"/>
                   </a:solidFill>
                 </a:rPr>
-                <a:t>14.10c</a:t>
+                <a:t>14,10c</a:t>
               </a:r>
             </a:p>
           </p:txBody>
@@ -14271,7 +14271,7 @@
                     <a:schemeClr val="tx1"/>
                   </a:solidFill>
                 </a:rPr>
-                <a:t>17.56c</a:t>
+                <a:t>17,56c</a:t>
               </a:r>
             </a:p>
           </p:txBody>
@@ -14395,7 +14395,7 @@
                     <a:schemeClr val="tx1"/>
                   </a:solidFill>
                 </a:rPr>
-                <a:t>55.25c</a:t>
+                <a:t>55,25c</a:t>
               </a:r>
             </a:p>
           </p:txBody>
@@ -14525,7 +14525,7 @@
                     <a:schemeClr val="tx1"/>
                   </a:solidFill>
                 </a:rPr>
-                <a:t>45.08c</a:t>
+                <a:t>45,08c</a:t>
               </a:r>
             </a:p>
           </p:txBody>
@@ -14655,7 +14655,7 @@
                     <a:schemeClr val="tx1"/>
                   </a:solidFill>
                 </a:rPr>
-                <a:t>49.61 c</a:t>
+                <a:t>49,61 c</a:t>
               </a:r>
             </a:p>
           </p:txBody>
@@ -14780,7 +14780,7 @@
                     <a:schemeClr val="tx1"/>
                   </a:solidFill>
                 </a:rPr>
-                <a:t>33.15c</a:t>
+                <a:t>33,15c</a:t>
               </a:r>
             </a:p>
           </p:txBody>
@@ -14910,7 +14910,7 @@
                     <a:schemeClr val="tx1"/>
                   </a:solidFill>
                 </a:rPr>
-                <a:t>18.59c</a:t>
+                <a:t>18,59c</a:t>
               </a:r>
             </a:p>
           </p:txBody>
@@ -15040,7 +15040,7 @@
                     <a:schemeClr val="tx1"/>
                   </a:solidFill>
                 </a:rPr>
-                <a:t>82.69c</a:t>
+                <a:t>82,69c</a:t>
               </a:r>
             </a:p>
           </p:txBody>
@@ -15169,7 +15169,7 @@
                     <a:schemeClr val="tx1"/>
                   </a:solidFill>
                 </a:rPr>
-                <a:t>16.54 c</a:t>
+                <a:t>16,54 c</a:t>
               </a:r>
             </a:p>
           </p:txBody>
